--- a/tests/benchmark/architectural_slides/case_030_two_column_policy/output.pptx
+++ b/tests/benchmark/architectural_slides/case_030_two_column_policy/output.pptx
@@ -910,7 +910,7 @@
         <p:spPr>
           <a:xfrm>
             <a:off x="640080" y="411480"/>
-            <a:ext cx="7863840" cy="502920"/>
+            <a:ext cx="7863840" cy="601218"/>
           </a:xfrm>
           <a:prstGeom prst="rect">
             <a:avLst/>
@@ -948,8 +948,8 @@
         </p:nvSpPr>
         <p:spPr>
           <a:xfrm>
-            <a:off x="640080" y="1028700"/>
-            <a:ext cx="3701491" cy="3307080"/>
+            <a:off x="640080" y="1126998"/>
+            <a:ext cx="3701491" cy="3208782"/>
           </a:xfrm>
           <a:prstGeom prst="rect">
             <a:avLst/>
@@ -987,8 +987,8 @@
         </p:nvSpPr>
         <p:spPr>
           <a:xfrm>
-            <a:off x="4493971" y="1028700"/>
-            <a:ext cx="4009949" cy="3307080"/>
+            <a:off x="4493971" y="1126998"/>
+            <a:ext cx="4009949" cy="3208782"/>
           </a:xfrm>
           <a:prstGeom prst="rect">
             <a:avLst/>

--- a/tests/benchmark/architectural_slides/case_030_two_column_policy/output.pptx
+++ b/tests/benchmark/architectural_slides/case_030_two_column_policy/output.pptx
@@ -910,7 +910,7 @@
         <p:spPr>
           <a:xfrm>
             <a:off x="640080" y="411480"/>
-            <a:ext cx="7863840" cy="601218"/>
+            <a:ext cx="7863840" cy="621792"/>
           </a:xfrm>
           <a:prstGeom prst="rect">
             <a:avLst/>
@@ -948,8 +948,8 @@
         </p:nvSpPr>
         <p:spPr>
           <a:xfrm>
-            <a:off x="640080" y="1126998"/>
-            <a:ext cx="3701491" cy="3208782"/>
+            <a:off x="640080" y="1147572"/>
+            <a:ext cx="3701491" cy="3188208"/>
           </a:xfrm>
           <a:prstGeom prst="rect">
             <a:avLst/>
@@ -987,8 +987,8 @@
         </p:nvSpPr>
         <p:spPr>
           <a:xfrm>
-            <a:off x="4493971" y="1126998"/>
-            <a:ext cx="4009949" cy="3208782"/>
+            <a:off x="4493971" y="1147572"/>
+            <a:ext cx="4009949" cy="3188208"/>
           </a:xfrm>
           <a:prstGeom prst="rect">
             <a:avLst/>

--- a/tests/benchmark/architectural_slides/case_030_two_column_policy/output.pptx
+++ b/tests/benchmark/architectural_slides/case_030_two_column_policy/output.pptx
@@ -910,7 +910,7 @@
         <p:spPr>
           <a:xfrm>
             <a:off x="640080" y="411480"/>
-            <a:ext cx="7863840" cy="621792"/>
+            <a:ext cx="7863840" cy="601218"/>
           </a:xfrm>
           <a:prstGeom prst="rect">
             <a:avLst/>
@@ -948,8 +948,8 @@
         </p:nvSpPr>
         <p:spPr>
           <a:xfrm>
-            <a:off x="640080" y="1147572"/>
-            <a:ext cx="3701491" cy="3188208"/>
+            <a:off x="640080" y="1126998"/>
+            <a:ext cx="3701491" cy="3208782"/>
           </a:xfrm>
           <a:prstGeom prst="rect">
             <a:avLst/>
@@ -987,8 +987,8 @@
         </p:nvSpPr>
         <p:spPr>
           <a:xfrm>
-            <a:off x="4493971" y="1147572"/>
-            <a:ext cx="4009949" cy="3188208"/>
+            <a:off x="4493971" y="1126998"/>
+            <a:ext cx="4009949" cy="3208782"/>
           </a:xfrm>
           <a:prstGeom prst="rect">
             <a:avLst/>
